--- a/praesentation/praesentation-evaluation-v1.pptx
+++ b/praesentation/praesentation-evaluation-v1.pptx
@@ -120,6 +120,11 @@
       </a:defRPr>
     </a:lvl9pPr>
   </p:defaultTextStyle>
+  <p:extLst>
+    <p:ext uri="{EFAFB233-063F-42B5-8137-9DF3F51BA10A}">
+      <p15:sldGuideLst xmlns:p15="http://schemas.microsoft.com/office/powerpoint/2012/main"/>
+    </p:ext>
+  </p:extLst>
 </p:presentation>
 </file>
 
@@ -1404,8 +1409,120 @@
           <a:lstStyle/>
           <a:p>
             <a:r>
-              <a:rPr lang="en-US"/>
-              <a:t>Namen der Gruppenmitglieder ergänzen. Einstiegssatz: Wir haben untersucht, wie zuverlässig KIs aus Lastenheften UML-Diagramme erzeugen – und wo man ihnen nicht trauen darf.</a:t>
+              <a:rPr lang="en-US" dirty="0"/>
+              <a:t>Namen der </a:t>
+            </a:r>
+            <a:r>
+              <a:rPr lang="en-US" dirty="0" err="1"/>
+              <a:t>Gruppenmitglieder</a:t>
+            </a:r>
+            <a:r>
+              <a:rPr lang="en-US" dirty="0"/>
+              <a:t> </a:t>
+            </a:r>
+            <a:r>
+              <a:rPr lang="en-US" dirty="0" err="1"/>
+              <a:t>ergänzen</a:t>
+            </a:r>
+            <a:r>
+              <a:rPr lang="en-US" dirty="0"/>
+              <a:t>. </a:t>
+            </a:r>
+            <a:r>
+              <a:rPr lang="en-US" dirty="0" err="1"/>
+              <a:t>Einstiegssatz</a:t>
+            </a:r>
+            <a:r>
+              <a:rPr lang="en-US" dirty="0"/>
+              <a:t>: Wir </a:t>
+            </a:r>
+            <a:r>
+              <a:rPr lang="en-US" dirty="0" err="1"/>
+              <a:t>haben</a:t>
+            </a:r>
+            <a:r>
+              <a:rPr lang="en-US" dirty="0"/>
+              <a:t> </a:t>
+            </a:r>
+            <a:r>
+              <a:rPr lang="en-US" dirty="0" err="1"/>
+              <a:t>untersucht</a:t>
+            </a:r>
+            <a:r>
+              <a:rPr lang="en-US" dirty="0"/>
+              <a:t>, </a:t>
+            </a:r>
+            <a:r>
+              <a:rPr lang="en-US" dirty="0" err="1"/>
+              <a:t>wie</a:t>
+            </a:r>
+            <a:r>
+              <a:rPr lang="en-US" dirty="0"/>
+              <a:t> </a:t>
+            </a:r>
+            <a:r>
+              <a:rPr lang="en-US" dirty="0" err="1"/>
+              <a:t>zuverlässig</a:t>
+            </a:r>
+            <a:r>
+              <a:rPr lang="en-US" dirty="0"/>
+              <a:t> KIs </a:t>
+            </a:r>
+            <a:r>
+              <a:rPr lang="en-US" dirty="0" err="1"/>
+              <a:t>aus</a:t>
+            </a:r>
+            <a:r>
+              <a:rPr lang="en-US" dirty="0"/>
+              <a:t> </a:t>
+            </a:r>
+            <a:r>
+              <a:rPr lang="en-US" dirty="0" err="1"/>
+              <a:t>Lastenheften</a:t>
+            </a:r>
+            <a:r>
+              <a:rPr lang="en-US" dirty="0"/>
+              <a:t> UML-</a:t>
+            </a:r>
+            <a:r>
+              <a:rPr lang="en-US" dirty="0" err="1"/>
+              <a:t>Diagramme</a:t>
+            </a:r>
+            <a:r>
+              <a:rPr lang="en-US" dirty="0"/>
+              <a:t> </a:t>
+            </a:r>
+            <a:r>
+              <a:rPr lang="en-US" dirty="0" err="1"/>
+              <a:t>erzeugen</a:t>
+            </a:r>
+            <a:r>
+              <a:rPr lang="en-US" dirty="0"/>
+              <a:t> – und wo man </a:t>
+            </a:r>
+            <a:r>
+              <a:rPr lang="en-US" dirty="0" err="1"/>
+              <a:t>ihnen</a:t>
+            </a:r>
+            <a:r>
+              <a:rPr lang="en-US" dirty="0"/>
+              <a:t> nicht </a:t>
+            </a:r>
+            <a:r>
+              <a:rPr lang="en-US" dirty="0" err="1"/>
+              <a:t>trauen</a:t>
+            </a:r>
+            <a:r>
+              <a:rPr lang="en-US" dirty="0"/>
+              <a:t> </a:t>
+            </a:r>
+            <a:r>
+              <a:rPr lang="en-US" dirty="0" err="1"/>
+              <a:t>darf</a:t>
+            </a:r>
+            <a:r>
+              <a:rPr lang="en-US" dirty="0"/>
+              <a:t>.</a:t>
             </a:r>
           </a:p>
         </p:txBody>
@@ -1490,10 +1607,7 @@
           <a:bodyPr/>
           <a:lstStyle/>
           <a:p>
-            <a:r>
-              <a:rPr lang="en-US"/>
-              <a:t>Belege: +28 Tage in ergebnisse/easylib/claude/sequenz (als Annahme gekennzeichnet, aber nicht im Lastenheft); Auto-Layout in ergebnisse/easyride/claude/klassendiagramm; ChatGPT-Bildfehler s. Fehlermuster-Folie. Hinweis zur Logik der Folie: Die Code-Staerke von ChatGPT ist bewusst als Beleg der Format-These formuliert (Code korrekt trotz falschem Bild derselben Zelle) – kein KI-Vorteil, denn laut Fusszeile liefern beide KIs beim Code vergleichbar stark. Erfundene Features gab es uebrigens bei KEINER der beiden KIs (in allen evaluation.md geprueft); deshalb steht das nicht mehr als Claude-Alleinstellungsmerkmal in der Spalte.</a:t>
-            </a:r>
+            <a:endParaRPr lang="en-US" dirty="0"/>
           </a:p>
         </p:txBody>
       </p:sp>
@@ -1577,10 +1691,7 @@
           <a:bodyPr/>
           <a:lstStyle/>
           <a:p>
-            <a:r>
-              <a:rPr lang="en-US"/>
-              <a:t>Wichtig: Der schlechteste Einzelfall (Leitbeispiel) lag ausgerechnet beim einfachsten System EasyRide – ein einfaches Lastenheft schützt also nicht überall; die Komplexität sitzt dort in den Assoziationen.</a:t>
-            </a:r>
+            <a:endParaRPr lang="en-US" dirty="0"/>
           </a:p>
         </p:txBody>
       </p:sp>
@@ -1664,10 +1775,7 @@
           <a:bodyPr/>
           <a:lstStyle/>
           <a:p>
-            <a:r>
-              <a:rPr lang="en-US"/>
-              <a:t>Mindestanforderungen (≥5 Use Cases/Aktivitäten/Aufrufe) wurden übrigens ausnahmslos erfüllt – die Schwächen liegen im Layout und in der Bildtreue, nicht im Umfang. Bilder: ergebnisse/easyride/claude/klassendiagramm/.</a:t>
-            </a:r>
+            <a:endParaRPr lang="en-US" dirty="0"/>
           </a:p>
         </p:txBody>
       </p:sp>
@@ -1751,9 +1859,7 @@
           <a:bodyPr/>
           <a:lstStyle/>
           <a:p>
-            <a:r>
-              <a:t>Dieses Direktbild wirkt auf den ersten Blick vollständig und übersichtlich. Bei genauer Prüfung gegen das Lastenheft und die UML-Semantik zeigen sich jedoch mehrere Fehler. Die vernetzten Bibliotheken sind an den falschen Use Case angeschlossen; Kundendaten einsehen besitzt keinen Akteursanschluss. Außerdem wurden Bestand durchsuchen und Standort und Status einsehen jeweils doppelt gezeichnet. Dadurch entstehen 17 statt der geforderten 15 Use Cases. Die Duplikate sind zusätzlich durch ungültige direkte Use-Case-zu-Use-Case-Linien verbunden. Das Beispiel bestätigt: Ein ordentliches Bild ersetzt keine fachliche Prüfung.</a:t>
-            </a:r>
+            <a:endParaRPr dirty="0"/>
           </a:p>
         </p:txBody>
       </p:sp>
@@ -1828,9 +1934,7 @@
           <a:bodyPr/>
           <a:lstStyle/>
           <a:p>
-            <a:r>
-              <a:t>Wie stark allein der Darstellungsweg wirkt, zeigt dieses Klassendiagramm. Beide Bilder enthalten dasselbe Modell. Das rechte Bild wurde aus dem vorhandenen PlantUML-Modell abgeleitet; deshalb vergleichen wir hier ausschließlich die Anordnung und Lesbarkeit, nicht die inhaltliche Qualität. PlantUML verteilt die Beziehungen weit über die Fläche, während der alternative Zeichenweg denselben Inhalt kompakter anordnet. Übergabe: Wir wissen jetzt, welche Strukturen robuster sind. Aber liefert derselbe Prompt beim nächsten Durchlauf überhaupt wieder dasselbe Ergebnis?</a:t>
-            </a:r>
+            <a:endParaRPr dirty="0"/>
           </a:p>
         </p:txBody>
       </p:sp>
@@ -1905,10 +2009,7 @@
           <a:bodyPr/>
           <a:lstStyle/>
           <a:p>
-            <a:r>
-              <a:rPr lang="en-US"/>
-              <a:t>Transparenz: Die zweiten Durchläufe liefen bei Claude (v2-Dateien in den Zellen). Das ist bewusst keine Prompt-Iteration, sondern ein Reproduzierbarkeits-Test – wissenschaftlich mindestens so interessant.</a:t>
-            </a:r>
+            <a:endParaRPr lang="en-US" dirty="0"/>
           </a:p>
         </p:txBody>
       </p:sp>
@@ -1992,10 +2093,7 @@
           <a:bodyPr/>
           <a:lstStyle/>
           <a:p>
-            <a:r>
-              <a:rPr lang="en-US"/>
-              <a:t>Diese Folie proaktiv bringen – sie beantwortet die kritischste Frage der Fragerunde, bevor sie gestellt wird, und zeigt wissenschaftliche Redlichkeit (Stichwort mögliche Publikation der Multi-Case-Studies).</a:t>
-            </a:r>
+            <a:endParaRPr lang="en-US" dirty="0"/>
           </a:p>
         </p:txBody>
       </p:sp>
@@ -2079,10 +2177,7 @@
           <a:bodyPr/>
           <a:lstStyle/>
           <a:p>
-            <a:r>
-              <a:rPr lang="en-US"/>
-              <a:t>Antworten für die Fragerunde: Warum kein Gemini? (keine Artefakte, Zellen offen statt erfunden) · Ist der Vergleich fair? (identische Prompts, frische Sessions, Original als Messobjekt) · Welche KI ist besser? (beim Code kaum Unterschied – der Unterschied liegt zwischen den Formaten) · Was würden wir anders machen? (echte Prompt-Iteration, unabhängige Bewertung von Anfang an, Gemini nachziehen).</a:t>
-            </a:r>
+            <a:endParaRPr lang="en-US" dirty="0"/>
           </a:p>
         </p:txBody>
       </p:sp>
@@ -2250,10 +2345,7 @@
           <a:bodyPr/>
           <a:lstStyle/>
           <a:p>
-            <a:r>
-              <a:rPr lang="en-US"/>
-              <a:t>Systeme aus OOSE-1-Lastenheften. Pro Zelle liegt alles im Repo: Original-Code der KI, gerendertes Bild, Direktbild, Roh-Notizen, Einzelbewertung.</a:t>
-            </a:r>
+            <a:endParaRPr lang="en-US" dirty="0"/>
           </a:p>
         </p:txBody>
       </p:sp>
@@ -2337,10 +2429,7 @@
           <a:bodyPr/>
           <a:lstStyle/>
           <a:p>
-            <a:r>
-              <a:rPr lang="en-US"/>
-              <a:t>Kernsatz: Wir haben nicht einfach 'die KI gefragt', sondern einen wiederholbaren Messaufbau gebaut. Git-Historie ggf. hier kurz zeigen (git log --oneline), sonst in der Demo.</a:t>
-            </a:r>
+            <a:endParaRPr lang="en-US" dirty="0"/>
           </a:p>
         </p:txBody>
       </p:sp>
@@ -2684,273 +2773,133 @@
           <a:lstStyle/>
           <a:p>
             <a:r>
-              <a:rPr lang="en-US"/>
-              <a:t>Je Zelle </a:t>
-            </a:r>
-            <a:r>
-              <a:rPr lang="en-US" err="1"/>
-              <a:t>gibt</a:t>
-            </a:r>
-            <a:r>
-              <a:rPr lang="en-US"/>
-              <a:t> es </a:t>
-            </a:r>
-            <a:r>
-              <a:rPr lang="en-US" err="1"/>
-              <a:t>eine</a:t>
-            </a:r>
-            <a:r>
-              <a:rPr lang="en-US"/>
+              <a:rPr lang="en-US" dirty="0">
+                <a:ea typeface="Calibri"/>
+                <a:cs typeface="Calibri"/>
+              </a:rPr>
+              <a:t>-&gt; Sagen, </a:t>
+            </a:r>
+            <a:r>
+              <a:rPr lang="en-US" dirty="0" err="1">
+                <a:ea typeface="Calibri"/>
+                <a:cs typeface="Calibri"/>
+              </a:rPr>
+              <a:t>dass</a:t>
+            </a:r>
+            <a:r>
+              <a:rPr lang="en-US" dirty="0">
+                <a:ea typeface="Calibri"/>
+                <a:cs typeface="Calibri"/>
+              </a:rPr>
+              <a:t> die KIs die </a:t>
+            </a:r>
+            <a:r>
+              <a:rPr lang="en-US" dirty="0" err="1">
+                <a:ea typeface="Calibri"/>
+                <a:cs typeface="Calibri"/>
+              </a:rPr>
+              <a:t>Unterschiede</a:t>
+            </a:r>
+            <a:r>
+              <a:rPr lang="en-US" dirty="0">
+                <a:ea typeface="Calibri"/>
+                <a:cs typeface="Calibri"/>
+              </a:rPr>
+              <a:t> von </a:t>
+            </a:r>
+            <a:r>
+              <a:rPr lang="en-US" dirty="0" err="1">
+                <a:ea typeface="Calibri"/>
+                <a:cs typeface="Calibri"/>
+              </a:rPr>
+              <a:t>direktbild</a:t>
+            </a:r>
+            <a:r>
+              <a:rPr lang="en-US" dirty="0">
+                <a:ea typeface="Calibri"/>
+                <a:cs typeface="Calibri"/>
+              </a:rPr>
+              <a:t> und </a:t>
+            </a:r>
+            <a:r>
+              <a:rPr lang="en-US" dirty="0" err="1">
+                <a:ea typeface="Calibri"/>
+                <a:cs typeface="Calibri"/>
+              </a:rPr>
+              <a:t>PlantUML</a:t>
+            </a:r>
+            <a:r>
+              <a:rPr lang="en-US" dirty="0">
+                <a:ea typeface="Calibri"/>
+                <a:cs typeface="Calibri"/>
+              </a:rPr>
               <a:t> </a:t>
             </a:r>
             <a:r>
-              <a:rPr lang="en-US" err="1"/>
-              <a:t>schriftliche</a:t>
-            </a:r>
-            <a:r>
-              <a:rPr lang="en-US"/>
+              <a:rPr lang="en-US" dirty="0" err="1">
+                <a:ea typeface="Calibri"/>
+                <a:cs typeface="Calibri"/>
+              </a:rPr>
+              <a:t>durch</a:t>
+            </a:r>
+            <a:r>
+              <a:rPr lang="en-US" dirty="0">
+                <a:ea typeface="Calibri"/>
+                <a:cs typeface="Calibri"/>
+              </a:rPr>
               <a:t> </a:t>
             </a:r>
             <a:r>
-              <a:rPr lang="en-US" err="1"/>
-              <a:t>Einzelbewertung</a:t>
-            </a:r>
-            <a:r>
-              <a:rPr lang="en-US"/>
-              <a:t> (evaluation.md) </a:t>
-            </a:r>
-            <a:r>
-              <a:rPr lang="en-US" err="1"/>
-              <a:t>mit</a:t>
-            </a:r>
-            <a:r>
-              <a:rPr lang="en-US"/>
+              <a:rPr lang="en-US" dirty="0" err="1">
+                <a:ea typeface="Calibri"/>
+                <a:cs typeface="Calibri"/>
+              </a:rPr>
+              <a:t>diese</a:t>
+            </a:r>
+            <a:r>
+              <a:rPr lang="en-US" dirty="0">
+                <a:ea typeface="Calibri"/>
+                <a:cs typeface="Calibri"/>
+              </a:rPr>
+              <a:t> vier </a:t>
+            </a:r>
+            <a:r>
+              <a:rPr lang="en-US" dirty="0" err="1">
+                <a:ea typeface="Calibri"/>
+                <a:cs typeface="Calibri"/>
+              </a:rPr>
+              <a:t>Fragen</a:t>
+            </a:r>
+            <a:r>
+              <a:rPr lang="en-US" dirty="0">
+                <a:ea typeface="Calibri"/>
+                <a:cs typeface="Calibri"/>
+              </a:rPr>
               <a:t> </a:t>
             </a:r>
             <a:r>
-              <a:rPr lang="en-US" err="1"/>
-              <a:t>Befundlisten</a:t>
-            </a:r>
-            <a:r>
-              <a:rPr lang="en-US"/>
-              <a:t> – </a:t>
-            </a:r>
-            <a:r>
-              <a:rPr lang="en-US" err="1"/>
-              <a:t>jede</a:t>
-            </a:r>
-            <a:r>
-              <a:rPr lang="en-US"/>
+              <a:rPr lang="en-US" dirty="0" err="1">
+                <a:ea typeface="Calibri"/>
+                <a:cs typeface="Calibri"/>
+              </a:rPr>
+              <a:t>verglichen</a:t>
+            </a:r>
+            <a:r>
+              <a:rPr lang="en-US" dirty="0">
+                <a:ea typeface="Calibri"/>
+                <a:cs typeface="Calibri"/>
+              </a:rPr>
               <a:t> </a:t>
             </a:r>
             <a:r>
-              <a:rPr lang="en-US" err="1"/>
-              <a:t>Aussage</a:t>
-            </a:r>
-            <a:r>
-              <a:rPr lang="en-US"/>
-              <a:t> in </a:t>
-            </a:r>
-            <a:r>
-              <a:rPr lang="en-US" err="1"/>
-              <a:t>diesem</a:t>
-            </a:r>
-            <a:r>
-              <a:rPr lang="en-US"/>
-              <a:t> </a:t>
-            </a:r>
-            <a:r>
-              <a:rPr lang="en-US" err="1"/>
-              <a:t>Vortrag</a:t>
-            </a:r>
-            <a:r>
-              <a:rPr lang="en-US"/>
-              <a:t> </a:t>
-            </a:r>
-            <a:r>
-              <a:rPr lang="en-US" err="1"/>
-              <a:t>ist</a:t>
-            </a:r>
-            <a:r>
-              <a:rPr lang="en-US"/>
-              <a:t> </a:t>
-            </a:r>
-            <a:r>
-              <a:rPr lang="en-US" err="1"/>
-              <a:t>dort</a:t>
-            </a:r>
-            <a:r>
-              <a:rPr lang="en-US"/>
-              <a:t> </a:t>
-            </a:r>
-            <a:r>
-              <a:rPr lang="en-US" err="1"/>
-              <a:t>mit</a:t>
-            </a:r>
-            <a:r>
-              <a:rPr lang="en-US"/>
-              <a:t> </a:t>
-            </a:r>
-            <a:r>
-              <a:rPr lang="en-US" err="1"/>
-              <a:t>einer</a:t>
-            </a:r>
-            <a:r>
-              <a:rPr lang="en-US"/>
-              <a:t> </a:t>
-            </a:r>
-            <a:r>
-              <a:rPr lang="en-US" err="1"/>
-              <a:t>konkreten</a:t>
-            </a:r>
-            <a:r>
-              <a:rPr lang="en-US"/>
-              <a:t> Zelle </a:t>
-            </a:r>
-            <a:r>
-              <a:rPr lang="en-US" err="1"/>
-              <a:t>belegbar</a:t>
-            </a:r>
-            <a:r>
-              <a:rPr lang="en-US"/>
-              <a:t>.</a:t>
-            </a:r>
-          </a:p>
-          <a:p>
-            <a:endParaRPr lang="en-US">
-              <a:ea typeface="Calibri"/>
-              <a:cs typeface="Calibri"/>
-            </a:endParaRPr>
-          </a:p>
-          <a:p>
-            <a:r>
-              <a:rPr lang="en-US">
-                <a:ea typeface="Calibri"/>
-                <a:cs typeface="Calibri"/>
-              </a:rPr>
-              <a:t>-&gt; Sagen, </a:t>
-            </a:r>
-            <a:r>
-              <a:rPr lang="en-US" err="1">
-                <a:ea typeface="Calibri"/>
-                <a:cs typeface="Calibri"/>
-              </a:rPr>
-              <a:t>dass</a:t>
-            </a:r>
-            <a:r>
-              <a:rPr lang="en-US">
-                <a:ea typeface="Calibri"/>
-                <a:cs typeface="Calibri"/>
-              </a:rPr>
-              <a:t> die KIs die </a:t>
-            </a:r>
-            <a:r>
-              <a:rPr lang="en-US" err="1">
-                <a:ea typeface="Calibri"/>
-                <a:cs typeface="Calibri"/>
-              </a:rPr>
-              <a:t>Unterschiede</a:t>
-            </a:r>
-            <a:r>
-              <a:rPr lang="en-US">
-                <a:ea typeface="Calibri"/>
-                <a:cs typeface="Calibri"/>
-              </a:rPr>
-              <a:t> von </a:t>
-            </a:r>
-            <a:r>
-              <a:rPr lang="en-US" err="1">
-                <a:ea typeface="Calibri"/>
-                <a:cs typeface="Calibri"/>
-              </a:rPr>
-              <a:t>direktbild</a:t>
-            </a:r>
-            <a:r>
-              <a:rPr lang="en-US">
-                <a:ea typeface="Calibri"/>
-                <a:cs typeface="Calibri"/>
-              </a:rPr>
-              <a:t> und </a:t>
-            </a:r>
-            <a:r>
-              <a:rPr lang="en-US" err="1">
-                <a:ea typeface="Calibri"/>
-                <a:cs typeface="Calibri"/>
-              </a:rPr>
-              <a:t>PlantUML</a:t>
-            </a:r>
-            <a:r>
-              <a:rPr lang="en-US">
-                <a:ea typeface="Calibri"/>
-                <a:cs typeface="Calibri"/>
-              </a:rPr>
-              <a:t> </a:t>
-            </a:r>
-            <a:r>
-              <a:rPr lang="en-US" err="1">
-                <a:ea typeface="Calibri"/>
-                <a:cs typeface="Calibri"/>
-              </a:rPr>
-              <a:t>durch</a:t>
-            </a:r>
-            <a:r>
-              <a:rPr lang="en-US">
-                <a:ea typeface="Calibri"/>
-                <a:cs typeface="Calibri"/>
-              </a:rPr>
-              <a:t> </a:t>
-            </a:r>
-            <a:r>
-              <a:rPr lang="en-US" err="1">
-                <a:ea typeface="Calibri"/>
-                <a:cs typeface="Calibri"/>
-              </a:rPr>
-              <a:t>diese</a:t>
-            </a:r>
-            <a:r>
-              <a:rPr lang="en-US">
-                <a:ea typeface="Calibri"/>
-                <a:cs typeface="Calibri"/>
-              </a:rPr>
-              <a:t> vier </a:t>
-            </a:r>
-            <a:r>
-              <a:rPr lang="en-US" err="1">
-                <a:ea typeface="Calibri"/>
-                <a:cs typeface="Calibri"/>
-              </a:rPr>
-              <a:t>Fragen</a:t>
-            </a:r>
-            <a:r>
-              <a:rPr lang="en-US">
-                <a:ea typeface="Calibri"/>
-                <a:cs typeface="Calibri"/>
-              </a:rPr>
-              <a:t> </a:t>
-            </a:r>
-            <a:r>
-              <a:rPr lang="en-US" err="1">
-                <a:ea typeface="Calibri"/>
-                <a:cs typeface="Calibri"/>
-              </a:rPr>
-              <a:t>verglichen</a:t>
-            </a:r>
-            <a:r>
-              <a:rPr lang="en-US">
-                <a:ea typeface="Calibri"/>
-                <a:cs typeface="Calibri"/>
-              </a:rPr>
-              <a:t> </a:t>
-            </a:r>
-            <a:r>
-              <a:rPr lang="en-US" err="1">
+              <a:rPr lang="en-US" dirty="0" err="1">
                 <a:ea typeface="Calibri"/>
                 <a:cs typeface="Calibri"/>
               </a:rPr>
               <a:t>haben</a:t>
             </a:r>
             <a:r>
-              <a:rPr lang="en-US">
+              <a:rPr lang="en-US" dirty="0">
                 <a:ea typeface="Calibri"/>
                 <a:cs typeface="Calibri"/>
               </a:rPr>
@@ -3039,10 +2988,7 @@
           <a:bodyPr/>
           <a:lstStyle/>
           <a:p>
-            <a:r>
-              <a:rPr lang="en-US"/>
-              <a:t>Erwartung vieler: KI-Code ist fehlerhaft. Unser Ergebnis: Kompilierbarkeit war nie das Problem. Belege: ergebnisse/easylib/chatgpt/use-case, ergebnisse/easyride/chatgpt/aktivitaet.</a:t>
-            </a:r>
+            <a:endParaRPr lang="en-US" dirty="0"/>
           </a:p>
         </p:txBody>
       </p:sp>
@@ -3126,10 +3072,7 @@
           <a:bodyPr/>
           <a:lstStyle/>
           <a:p>
-            <a:r>
-              <a:rPr lang="en-US"/>
-              <a:t>Das ist unser Leitbeispiel: Das aufgeräumte, kontrastreiche Direktbild wirkt überzeugend – enthält aber fachliche Fehler gegen das Lastenheft. Der PlantUML-Code aus derselben Antwort modelliert alles richtig. Quelle: ergebnisse/easyride/chatgpt/klassendiagramm/. Merksatz für die Folie danach: Im Zweifel gilt der Code.</a:t>
-            </a:r>
+            <a:endParaRPr lang="en-US" dirty="0"/>
           </a:p>
         </p:txBody>
       </p:sp>
@@ -3213,10 +3156,7 @@
           <a:bodyPr/>
           <a:lstStyle/>
           <a:p>
-            <a:r>
-              <a:rPr lang="en-US"/>
-              <a:t>Muster statt Einzelfälle: Diese vier Kategorien decken alle beobachteten Bildfehler ab. Systeme und Diagrammtypen stehen jetzt ausformuliert auf der Folie; vollständige Zellpfade hier. Belege (je Muster mind. 2): M1 easyscoot/chatgpt/klassendiagramm (Preis-Abhängigkeit am EScooter statt an Fahrt; im Code korrekt) und easyride/chatgpt/klassendiagramm (Folie 8: drei Fehlanschlüsse, K2 direkt 2/5). M2 easyscoot/chatgpt/use-case (Nutzung beenden an E-Scooter-Software, Wartungsmodus beenden am Rechnungssystem – vertauscht), easylib/chatgpt/use-case (Vernetzte Bibliotheken an Leihfrist verlängern statt Bestandssuche; Kundendaten einsehen ohne Akteur) und easyscoot/chatgpt/aktivitaet (Nutzung beenden in der System- statt Kunden-Swimlane). M3 easylib/chatgpt/use-case (Bestand durchsuchen + Standort/Status einsehen je doppelt, 17 statt 15 Use Cases) und easyscoot/chatgpt/sequenz (Fahrtzusammenfassung doppelt gesendet, einmal vor der Preisberechnung). M4 easyride/claude/sequenz (loop-Fragment + Notizen fehlen im Direktbild), easylib/claude/sequenz (alt-Fragment/Fehlerfall fehlt) sowie bei ChatGPT alle drei Aktivitätsdiagramme: easyscoot (geforderte Entscheidung fehlt komplett), easyride (zweite Entscheidung fehlt), easylib (drei Swimlanes fehlen) – jeweils im Code vorhanden. Für Rückfragen: Bei ChatGPT stammen Bild und Code aus getrennten Durchläufen mit identischem Prompt (dokumentiert in den evaluation.md); bei Claudes Sequenz-v2 nachweislich aus demselben Durchlauf.</a:t>
-            </a:r>
+            <a:endParaRPr lang="en-US" dirty="0"/>
           </a:p>
         </p:txBody>
       </p:sp>
